--- a/catalog/samples/research_basis.pptx
+++ b/catalog/samples/research_basis.pptx
@@ -1122,7 +1122,7 @@
           </a:p>
           <a:p>
             <a:r>
-              <a:t>  "template_sha256": "c0041bc34d7ae7f107344511784142cf4fd4e2ede666aa695ce65aeff58b55a9"</a:t>
+              <a:t>  "template_sha256": "8efd359fa5477f35e9372bf3ae736800dbe8114b515a865e32c05a058ecee0b7"</a:t>
             </a:r>
           </a:p>
           <a:p>
